--- a/media/exports/reports/2026-10/cash-payroll.pptx
+++ b/media/exports/reports/2026-10/cash-payroll.pptx
@@ -5669,7 +5669,7 @@
                 </a:solidFill>
                 <a:latin typeface="Roboto"/>
               </a:rPr>
-              <a:t>Data retrieved 2pm, Tue 6 Oct 2026 · Generated 9 Oct 2026, 8:41am · Sample data · Made with Python (python-pptx)</a:t>
+              <a:t>Data retrieved 2pm, Tue 6 Oct 2026 · Generated 9 Oct 2026, 1:20pm · Sample data · Made with Python (python-pptx)</a:t>
             </a:r>
           </a:p>
         </p:txBody>
@@ -6977,7 +6977,7 @@
                 </a:solidFill>
                 <a:latin typeface="Roboto"/>
               </a:rPr>
-              <a:t>Data retrieved 2pm, Tue 6 Oct 2026 · Generated 9 Oct 2026, 8:41am · Sample data · Made with Python (python-pptx)</a:t>
+              <a:t>Data retrieved 2pm, Tue 6 Oct 2026 · Generated 9 Oct 2026, 1:20pm · Sample data · Made with Python (python-pptx)</a:t>
             </a:r>
           </a:p>
         </p:txBody>
@@ -7580,7 +7580,7 @@
                 </a:solidFill>
                 <a:latin typeface="Roboto"/>
               </a:rPr>
-              <a:t>Data retrieved 2pm, Tue 6 Oct 2026 · Generated 9 Oct 2026, 8:41am · Sample data · Made with Python (python-pptx)</a:t>
+              <a:t>Data retrieved 2pm, Tue 6 Oct 2026 · Generated 9 Oct 2026, 1:20pm · Sample data · Made with Python (python-pptx)</a:t>
             </a:r>
           </a:p>
         </p:txBody>
@@ -7895,7 +7895,7 @@
                 </a:solidFill>
                 <a:latin typeface="Roboto"/>
               </a:rPr>
-              <a:t>Data retrieved 2pm, Tue 6 Oct 2026 · Generated 9 Oct 2026, 8:41am · Sample data · Made with Python (python-pptx)</a:t>
+              <a:t>Data retrieved 2pm, Tue 6 Oct 2026 · Generated 9 Oct 2026, 1:20pm · Sample data · Made with Python (python-pptx)</a:t>
             </a:r>
           </a:p>
         </p:txBody>
@@ -12034,7 +12034,7 @@
                 </a:solidFill>
                 <a:latin typeface="Roboto"/>
               </a:rPr>
-              <a:t>Data retrieved 2pm, Tue 6 Oct 2026 · Generated 9 Oct 2026, 8:41am · Sample data · Made with Python (python-pptx)</a:t>
+              <a:t>Data retrieved 2pm, Tue 6 Oct 2026 · Generated 9 Oct 2026, 1:20pm · Sample data · Made with Python (python-pptx)</a:t>
             </a:r>
           </a:p>
         </p:txBody>
@@ -13358,7 +13358,7 @@
                           </a:solidFill>
                           <a:latin typeface="Roboto"/>
                         </a:rPr>
-                        <a:t>Call-out 15, September</a:t>
+                        <a:t>Call-out CO-49240</a:t>
                       </a:r>
                     </a:p>
                   </a:txBody>
@@ -13495,7 +13495,7 @@
                           </a:solidFill>
                           <a:latin typeface="Roboto"/>
                         </a:rPr>
-                        <a:t>Call-out 9, September</a:t>
+                        <a:t>Call-out CO-49233</a:t>
                       </a:r>
                     </a:p>
                   </a:txBody>
@@ -13632,7 +13632,7 @@
                           </a:solidFill>
                           <a:latin typeface="Roboto"/>
                         </a:rPr>
-                        <a:t>Call-out 32, September</a:t>
+                        <a:t>Call-out CO-49260</a:t>
                       </a:r>
                     </a:p>
                   </a:txBody>
@@ -13769,7 +13769,7 @@
                           </a:solidFill>
                           <a:latin typeface="Roboto"/>
                         </a:rPr>
-                        <a:t>Call-out 28, September</a:t>
+                        <a:t>Call-out CO-49255</a:t>
                       </a:r>
                     </a:p>
                   </a:txBody>
@@ -13906,7 +13906,7 @@
                           </a:solidFill>
                           <a:latin typeface="Roboto"/>
                         </a:rPr>
-                        <a:t>Call-out 49, September</a:t>
+                        <a:t>Call-out CO-49280</a:t>
                       </a:r>
                     </a:p>
                   </a:txBody>
@@ -14043,7 +14043,7 @@
                           </a:solidFill>
                           <a:latin typeface="Roboto"/>
                         </a:rPr>
-                        <a:t>Call-out 63, September</a:t>
+                        <a:t>Call-out CO-49296</a:t>
                       </a:r>
                     </a:p>
                   </a:txBody>
@@ -14180,7 +14180,7 @@
                           </a:solidFill>
                           <a:latin typeface="Roboto"/>
                         </a:rPr>
-                        <a:t>Call-out 50, September</a:t>
+                        <a:t>Call-out CO-49281</a:t>
                       </a:r>
                     </a:p>
                   </a:txBody>
@@ -14376,7 +14376,7 @@
                 </a:solidFill>
                 <a:latin typeface="Roboto"/>
               </a:rPr>
-              <a:t>Data retrieved 2pm, Tue 6 Oct 2026 · Generated 9 Oct 2026, 8:41am · Sample data · Made with Python (python-pptx)</a:t>
+              <a:t>Data retrieved 2pm, Tue 6 Oct 2026 · Generated 9 Oct 2026, 1:20pm · Sample data · Made with Python (python-pptx)</a:t>
             </a:r>
           </a:p>
         </p:txBody>
@@ -14741,7 +14741,7 @@
                           </a:solidFill>
                           <a:latin typeface="Roboto"/>
                         </a:rPr>
-                        <a:t>Call-out 22, September</a:t>
+                        <a:t>Call-out CO-49248</a:t>
                       </a:r>
                     </a:p>
                   </a:txBody>
@@ -14878,7 +14878,7 @@
                           </a:solidFill>
                           <a:latin typeface="Roboto"/>
                         </a:rPr>
-                        <a:t>Call-out 38, September</a:t>
+                        <a:t>Call-out CO-49267</a:t>
                       </a:r>
                     </a:p>
                   </a:txBody>
@@ -15015,7 +15015,7 @@
                           </a:solidFill>
                           <a:latin typeface="Roboto"/>
                         </a:rPr>
-                        <a:t>Call-out 26, September</a:t>
+                        <a:t>Call-out CO-49253</a:t>
                       </a:r>
                     </a:p>
                   </a:txBody>
@@ -15152,7 +15152,7 @@
                           </a:solidFill>
                           <a:latin typeface="Roboto"/>
                         </a:rPr>
-                        <a:t>Call-out 31, September</a:t>
+                        <a:t>Call-out CO-49259</a:t>
                       </a:r>
                     </a:p>
                   </a:txBody>
@@ -15289,7 +15289,7 @@
                           </a:solidFill>
                           <a:latin typeface="Roboto"/>
                         </a:rPr>
-                        <a:t>Call-out 43, September</a:t>
+                        <a:t>Call-out CO-49273</a:t>
                       </a:r>
                     </a:p>
                   </a:txBody>
@@ -15485,7 +15485,7 @@
                 </a:solidFill>
                 <a:latin typeface="Roboto"/>
               </a:rPr>
-              <a:t>Data retrieved 2pm, Tue 6 Oct 2026 · Generated 9 Oct 2026, 8:41am · Sample data · Made with Python (python-pptx)</a:t>
+              <a:t>Data retrieved 2pm, Tue 6 Oct 2026 · Generated 9 Oct 2026, 1:20pm · Sample data · Made with Python (python-pptx)</a:t>
             </a:r>
           </a:p>
         </p:txBody>

--- a/media/exports/reports/2026-10/cash-payroll.pptx
+++ b/media/exports/reports/2026-10/cash-payroll.pptx
@@ -1850,7 +1850,7 @@
           <a:lstStyle/>
           <a:p>
             <a:r>
-              <a:t>Will cash cover payroll next month?. Sample Electrical &amp; Air Pty Ltd. Period: October 2026 to date. A 13-week cash forecast from 2pm on 6 October: cash at bank, plus what customers owe on their usual payment dates and new work at its recent rate, less pay runs, supplier bills, the BAS and finance on their due dates. Every day opens its workings.</a:t>
+              <a:t>Will cash cover payroll next month?. Sample Electrical &amp; Air Pty Ltd. Period: October 2026 to date. In short: Yes: $98,068 forecast in the bank after the 26 November pay run, the tightest in November, and at least one pay run in reserve for all 13 weeks. It depends on $86,470 of overdue invoices arriving. A 13-week cash forecast from 2pm on 6 October: cash at bank, plus what customers owe on their usual payment dates and new work at its recent rate, less pay runs, supplier bills, the BAS and finance on their due dates. Every day opens its workings.</a:t>
             </a:r>
           </a:p>
         </p:txBody>
@@ -5495,7 +5495,7 @@
         <p:spPr>
           <a:xfrm>
             <a:off x="457200" y="3703320"/>
-            <a:ext cx="11277295" cy="758190"/>
+            <a:ext cx="11277295" cy="980440"/>
           </a:xfrm>
           <a:prstGeom prst="rect">
             <a:avLst/>
@@ -5520,7 +5520,7 @@
                 </a:solidFill>
                 <a:latin typeface="Roboto"/>
               </a:rPr>
-              <a:t>Period: October 2026 to date. A 13-week cash forecast from 2pm on 6 October: cash at bank, plus what customers owe on their usual payment dates and new work at its recent rate, less pay runs, supplier bills, the BAS and finance on their due dates. Every day opens its workings.</a:t>
+              <a:t>Period: October 2026 to date. In short: Yes: $98,068 forecast in the bank after the 26 November pay run, the tightest in November, and at least one pay run in reserve for all 13 weeks. It depends on $86,470 of overdue invoices arriving. A 13-week cash forecast from 2pm on 6 October: cash at bank, plus what customers owe on their usual payment dates and new work at its recent rate, less pay runs, supplier bills, the BAS and finance on their due dates. Every day opens its workings.</a:t>
             </a:r>
           </a:p>
         </p:txBody>
@@ -5533,7 +5533,7 @@
         </p:nvSpPr>
         <p:spPr>
           <a:xfrm>
-            <a:off x="457200" y="4552950"/>
+            <a:off x="457200" y="4775200"/>
             <a:ext cx="11277295" cy="1097280"/>
           </a:xfrm>
           <a:prstGeom prst="rect">
@@ -5669,7 +5669,7 @@
                 </a:solidFill>
                 <a:latin typeface="Roboto"/>
               </a:rPr>
-              <a:t>Data retrieved 2pm, Tue 6 Oct 2026 · Generated 9 Oct 2026, 1:20pm · Sample data · Made with Python (python-pptx)</a:t>
+              <a:t>Data retrieved 2pm, Tue 6 Oct 2026 · Generated 10 Oct 2026, 9:55pm · Sample data · Made with Python (python-pptx)</a:t>
             </a:r>
           </a:p>
         </p:txBody>
@@ -6977,7 +6977,7 @@
                 </a:solidFill>
                 <a:latin typeface="Roboto"/>
               </a:rPr>
-              <a:t>Data retrieved 2pm, Tue 6 Oct 2026 · Generated 9 Oct 2026, 1:20pm · Sample data · Made with Python (python-pptx)</a:t>
+              <a:t>Data retrieved 2pm, Tue 6 Oct 2026 · Generated 10 Oct 2026, 9:55pm · Sample data · Made with Python (python-pptx)</a:t>
             </a:r>
           </a:p>
         </p:txBody>
@@ -7580,7 +7580,7 @@
                 </a:solidFill>
                 <a:latin typeface="Roboto"/>
               </a:rPr>
-              <a:t>Data retrieved 2pm, Tue 6 Oct 2026 · Generated 9 Oct 2026, 1:20pm · Sample data · Made with Python (python-pptx)</a:t>
+              <a:t>Data retrieved 2pm, Tue 6 Oct 2026 · Generated 10 Oct 2026, 9:55pm · Sample data · Made with Python (python-pptx)</a:t>
             </a:r>
           </a:p>
         </p:txBody>
@@ -7895,7 +7895,7 @@
                 </a:solidFill>
                 <a:latin typeface="Roboto"/>
               </a:rPr>
-              <a:t>Data retrieved 2pm, Tue 6 Oct 2026 · Generated 9 Oct 2026, 1:20pm · Sample data · Made with Python (python-pptx)</a:t>
+              <a:t>Data retrieved 2pm, Tue 6 Oct 2026 · Generated 10 Oct 2026, 9:55pm · Sample data · Made with Python (python-pptx)</a:t>
             </a:r>
           </a:p>
         </p:txBody>
@@ -12034,7 +12034,7 @@
                 </a:solidFill>
                 <a:latin typeface="Roboto"/>
               </a:rPr>
-              <a:t>Data retrieved 2pm, Tue 6 Oct 2026 · Generated 9 Oct 2026, 1:20pm · Sample data · Made with Python (python-pptx)</a:t>
+              <a:t>Data retrieved 2pm, Tue 6 Oct 2026 · Generated 10 Oct 2026, 9:55pm · Sample data · Made with Python (python-pptx)</a:t>
             </a:r>
           </a:p>
         </p:txBody>
@@ -14376,7 +14376,7 @@
                 </a:solidFill>
                 <a:latin typeface="Roboto"/>
               </a:rPr>
-              <a:t>Data retrieved 2pm, Tue 6 Oct 2026 · Generated 9 Oct 2026, 1:20pm · Sample data · Made with Python (python-pptx)</a:t>
+              <a:t>Data retrieved 2pm, Tue 6 Oct 2026 · Generated 10 Oct 2026, 9:55pm · Sample data · Made with Python (python-pptx)</a:t>
             </a:r>
           </a:p>
         </p:txBody>
@@ -15485,7 +15485,7 @@
                 </a:solidFill>
                 <a:latin typeface="Roboto"/>
               </a:rPr>
-              <a:t>Data retrieved 2pm, Tue 6 Oct 2026 · Generated 9 Oct 2026, 1:20pm · Sample data · Made with Python (python-pptx)</a:t>
+              <a:t>Data retrieved 2pm, Tue 6 Oct 2026 · Generated 10 Oct 2026, 9:55pm · Sample data · Made with Python (python-pptx)</a:t>
             </a:r>
           </a:p>
         </p:txBody>
